--- a/slides/soutenance_20min.pptx
+++ b/slides/soutenance_20min.pptx
@@ -4567,8 +4567,8 @@
         </p:nvSpPr>
         <p:spPr>
           <a:xfrm rot="0">
-            <a:off x="13023876" y="2654935"/>
-            <a:ext cx="4235424" cy="2736215"/>
+            <a:off x="11953456" y="2329801"/>
+            <a:ext cx="5449724" cy="5924550"/>
           </a:xfrm>
           <a:prstGeom prst="rect">
             <a:avLst/>
@@ -4582,11 +4582,11 @@
           <a:p>
             <a:pPr algn="l">
               <a:lnSpc>
-                <a:spcPts val="1960"/>
+                <a:spcPts val="2239"/>
               </a:lnSpc>
             </a:pPr>
             <a:r>
-              <a:rPr lang="en-US" b="true" sz="1400" spc="-68" u="sng">
+              <a:rPr lang="en-US" b="true" sz="1599" spc="-78" u="sng">
                 <a:solidFill>
                   <a:srgbClr val="000000"/>
                 </a:solidFill>
@@ -4597,6 +4597,13 @@
               </a:rPr>
               <a:t>Principaux constats :</a:t>
             </a:r>
+          </a:p>
+          <a:p>
+            <a:pPr algn="l">
+              <a:lnSpc>
+                <a:spcPts val="1772"/>
+              </a:lnSpc>
+            </a:pPr>
           </a:p>
           <a:p>
             <a:pPr algn="l" marL="302261" indent="-151130" lvl="1">
@@ -4616,15 +4623,8 @@
                 <a:cs typeface="Arial"/>
                 <a:sym typeface="Arial"/>
               </a:rPr>
-              <a:t>Le CA 2024 est supérieur au CA 2023 sur l'ensemble de l'année.</a:t>
+              <a:t>Le CA 2024 atteint 15,7 K€, contre 7,8 K€ en 2023, soit une croissance de +101 %.</a:t>
             </a:r>
-          </a:p>
-          <a:p>
-            <a:pPr algn="l">
-              <a:lnSpc>
-                <a:spcPts val="1960"/>
-              </a:lnSpc>
-            </a:pPr>
           </a:p>
           <a:p>
             <a:pPr algn="l" marL="302261" indent="-151130" lvl="1">
@@ -4644,7 +4644,7 @@
                 <a:cs typeface="Arial"/>
                 <a:sym typeface="Arial"/>
               </a:rPr>
-              <a:t>Les pics de ventes s</a:t>
+              <a:t>Les performances 2024 s</a:t>
             </a:r>
             <a:r>
               <a:rPr lang="en-US" sz="1400" spc="-68">
@@ -4656,29 +4656,7 @@
                 <a:cs typeface="Arial"/>
                 <a:sym typeface="Arial"/>
               </a:rPr>
-              <a:t>ont observés en : </a:t>
-            </a:r>
-          </a:p>
-          <a:p>
-            <a:pPr algn="l">
-              <a:lnSpc>
-                <a:spcPts val="1960"/>
-              </a:lnSpc>
-              <a:spcBef>
-                <a:spcPct val="0"/>
-              </a:spcBef>
-            </a:pPr>
-            <a:r>
-              <a:rPr lang="en-US" sz="1400" spc="-68">
-                <a:solidFill>
-                  <a:srgbClr val="000000"/>
-                </a:solidFill>
-                <a:latin typeface="Arial"/>
-                <a:ea typeface="Arial"/>
-                <a:cs typeface="Arial"/>
-                <a:sym typeface="Arial"/>
-              </a:rPr>
-              <a:t>            - J</a:t>
+              <a:t>ont supérieures à celles de</a:t>
             </a:r>
             <a:r>
               <a:rPr lang="en-US" sz="1400" spc="-68">
@@ -4690,18 +4668,8 @@
                 <a:cs typeface="Arial"/>
                 <a:sym typeface="Arial"/>
               </a:rPr>
-              <a:t>uin 2024 : 1 822 €</a:t>
+              <a:t> 2023 sur tous l</a:t>
             </a:r>
-          </a:p>
-          <a:p>
-            <a:pPr algn="l">
-              <a:lnSpc>
-                <a:spcPts val="1960"/>
-              </a:lnSpc>
-              <a:spcBef>
-                <a:spcPct val="0"/>
-              </a:spcBef>
-            </a:pPr>
             <a:r>
               <a:rPr lang="en-US" sz="1400" spc="-68">
                 <a:solidFill>
@@ -4712,18 +4680,8 @@
                 <a:cs typeface="Arial"/>
                 <a:sym typeface="Arial"/>
               </a:rPr>
-              <a:t>            - Octobre 2024 : 2 389 €</a:t>
+              <a:t>es mois de l'année.</a:t>
             </a:r>
-          </a:p>
-          <a:p>
-            <a:pPr algn="l">
-              <a:lnSpc>
-                <a:spcPts val="1960"/>
-              </a:lnSpc>
-              <a:spcBef>
-                <a:spcPct val="0"/>
-              </a:spcBef>
-            </a:pPr>
           </a:p>
           <a:p>
             <a:pPr algn="l" marL="302261" indent="-151130" lvl="1">
@@ -4743,45 +4701,7 @@
                 <a:cs typeface="Arial"/>
                 <a:sym typeface="Arial"/>
               </a:rPr>
-              <a:t>Les mois les plus faibles sont :</a:t>
-            </a:r>
-          </a:p>
-          <a:p>
-            <a:pPr algn="l">
-              <a:lnSpc>
-                <a:spcPts val="1960"/>
-              </a:lnSpc>
-            </a:pPr>
-            <a:r>
-              <a:rPr lang="en-US" sz="1400" spc="-68">
-                <a:solidFill>
-                  <a:srgbClr val="000000"/>
-                </a:solidFill>
-                <a:latin typeface="Arial"/>
-                <a:ea typeface="Arial"/>
-                <a:cs typeface="Arial"/>
-                <a:sym typeface="Arial"/>
-              </a:rPr>
-              <a:t>             - Février 2024 : 771 €</a:t>
-            </a:r>
-          </a:p>
-          <a:p>
-            <a:pPr algn="l">
-              <a:lnSpc>
-                <a:spcPts val="1960"/>
-              </a:lnSpc>
-            </a:pPr>
-            <a:r>
-              <a:rPr lang="en-US" sz="1400" spc="-68">
-                <a:solidFill>
-                  <a:srgbClr val="000000"/>
-                </a:solidFill>
-                <a:latin typeface="Arial"/>
-                <a:ea typeface="Arial"/>
-                <a:cs typeface="Arial"/>
-                <a:sym typeface="Arial"/>
-              </a:rPr>
-              <a:t>             - </a:t>
+              <a:t> La croissance s'accélère au second semestre, avec</a:t>
             </a:r>
             <a:r>
               <a:rPr lang="en-US" sz="1400" spc="-68">
@@ -4793,31 +4713,28 @@
                 <a:cs typeface="Arial"/>
                 <a:sym typeface="Arial"/>
               </a:rPr>
-              <a:t>Juillet 2024 : 723 €</a:t>
+              <a:t> une forte dynamique entre août </a:t>
             </a:r>
-          </a:p>
-        </p:txBody>
-      </p:sp>
-      <p:sp>
-        <p:nvSpPr>
-          <p:cNvPr name="TextBox 11" id="11"/>
-          <p:cNvSpPr txBox="true"/>
-          <p:nvPr/>
-        </p:nvSpPr>
-        <p:spPr>
-          <a:xfrm rot="0">
-            <a:off x="13023876" y="5547460"/>
-            <a:ext cx="3841006" cy="2295525"/>
-          </a:xfrm>
-          <a:prstGeom prst="rect">
-            <a:avLst/>
-          </a:prstGeom>
-        </p:spPr>
-        <p:txBody>
-          <a:bodyPr anchor="t" rtlCol="false" tIns="0" lIns="0" bIns="0" rIns="0">
-            <a:spAutoFit/>
-          </a:bodyPr>
-          <a:lstStyle/>
+            <a:r>
+              <a:rPr lang="en-US" sz="1400" spc="-68">
+                <a:solidFill>
+                  <a:srgbClr val="000000"/>
+                </a:solidFill>
+                <a:latin typeface="Arial"/>
+                <a:ea typeface="Arial"/>
+                <a:cs typeface="Arial"/>
+                <a:sym typeface="Arial"/>
+              </a:rPr>
+              <a:t>et décembre.</a:t>
+            </a:r>
+          </a:p>
+          <a:p>
+            <a:pPr algn="l">
+              <a:lnSpc>
+                <a:spcPts val="1772"/>
+              </a:lnSpc>
+            </a:pPr>
+          </a:p>
           <a:p>
             <a:pPr algn="l">
               <a:lnSpc>
@@ -4834,8 +4751,15 @@
                 <a:cs typeface="Arial Bold"/>
                 <a:sym typeface="Arial Bold"/>
               </a:rPr>
-              <a:t>Insight clé :</a:t>
+              <a:t>Insights clés:</a:t>
             </a:r>
+          </a:p>
+          <a:p>
+            <a:pPr algn="l">
+              <a:lnSpc>
+                <a:spcPts val="1772"/>
+              </a:lnSpc>
+            </a:pPr>
           </a:p>
           <a:p>
             <a:pPr algn="l" marL="302261" indent="-151130" lvl="1">
@@ -4855,45 +4779,7 @@
                 <a:cs typeface="Arial"/>
                 <a:sym typeface="Arial"/>
               </a:rPr>
-              <a:t>Le second semestre 2024 est le principal moteur de croissance, avec un pic de ventes e</a:t>
-            </a:r>
-            <a:r>
-              <a:rPr lang="en-US" sz="1400" spc="-68">
-                <a:solidFill>
-                  <a:srgbClr val="000000"/>
-                </a:solidFill>
-                <a:latin typeface="Arial"/>
-                <a:ea typeface="Arial"/>
-                <a:cs typeface="Arial"/>
-                <a:sym typeface="Arial"/>
-              </a:rPr>
-              <a:t>n octobre (+87 % vs octobre 2023).</a:t>
-            </a:r>
-          </a:p>
-          <a:p>
-            <a:pPr algn="l">
-              <a:lnSpc>
-                <a:spcPts val="1960"/>
-              </a:lnSpc>
-            </a:pPr>
-          </a:p>
-          <a:p>
-            <a:pPr algn="l">
-              <a:lnSpc>
-                <a:spcPts val="2239"/>
-              </a:lnSpc>
-            </a:pPr>
-            <a:r>
-              <a:rPr lang="en-US" b="true" sz="1599" spc="-78" u="sng">
-                <a:solidFill>
-                  <a:srgbClr val="000000"/>
-                </a:solidFill>
-                <a:latin typeface="Arial Bold"/>
-                <a:ea typeface="Arial Bold"/>
-                <a:cs typeface="Arial Bold"/>
-                <a:sym typeface="Arial Bold"/>
-              </a:rPr>
-              <a:t>Recommandation :</a:t>
+              <a:t>Le second semestre 2024 est le principal moteur de croissance, avec un pic de ventes en octobre (+87 % vs octobre 2023).</a:t>
             </a:r>
           </a:p>
           <a:p>
@@ -4914,14 +4800,110 @@
                 <a:cs typeface="Arial"/>
                 <a:sym typeface="Arial"/>
               </a:rPr>
-              <a:t>Renforcer les campagnes marketing et anticiper les stocks sur les périodes à forte demande, notamment au Timestre 4.</a:t>
+              <a:t> Malgré quelques ralentissements en février et juillet, le niveau d'activité 2024 reste supérieur à celui de 2023.</a:t>
+            </a:r>
+          </a:p>
+          <a:p>
+            <a:pPr algn="l">
+              <a:lnSpc>
+                <a:spcPts val="1772"/>
+              </a:lnSpc>
+            </a:pPr>
+          </a:p>
+          <a:p>
+            <a:pPr algn="l">
+              <a:lnSpc>
+                <a:spcPts val="2239"/>
+              </a:lnSpc>
+            </a:pPr>
+            <a:r>
+              <a:rPr lang="en-US" b="true" sz="1599" spc="-78" u="sng">
+                <a:solidFill>
+                  <a:srgbClr val="000000"/>
+                </a:solidFill>
+                <a:latin typeface="Arial Bold"/>
+                <a:ea typeface="Arial Bold"/>
+                <a:cs typeface="Arial Bold"/>
+                <a:sym typeface="Arial Bold"/>
+              </a:rPr>
+              <a:t>Recommandations :</a:t>
+            </a:r>
+          </a:p>
+          <a:p>
+            <a:pPr algn="l">
+              <a:lnSpc>
+                <a:spcPts val="1960"/>
+              </a:lnSpc>
+            </a:pPr>
+          </a:p>
+          <a:p>
+            <a:pPr algn="l" marL="302261" indent="-151130" lvl="1">
+              <a:lnSpc>
+                <a:spcPts val="1960"/>
+              </a:lnSpc>
+              <a:buFont typeface="Arial"/>
+              <a:buChar char="•"/>
+            </a:pPr>
+            <a:r>
+              <a:rPr lang="en-US" sz="1400" spc="-68">
+                <a:solidFill>
+                  <a:srgbClr val="000000"/>
+                </a:solidFill>
+                <a:latin typeface="Arial"/>
+                <a:ea typeface="Arial"/>
+                <a:cs typeface="Arial"/>
+                <a:sym typeface="Arial"/>
+              </a:rPr>
+              <a:t>Renforcer les campagnes marketing dès T3</a:t>
+            </a:r>
+          </a:p>
+          <a:p>
+            <a:pPr algn="l" marL="302261" indent="-151130" lvl="1">
+              <a:lnSpc>
+                <a:spcPts val="1960"/>
+              </a:lnSpc>
+              <a:buFont typeface="Arial"/>
+              <a:buChar char="•"/>
+            </a:pPr>
+            <a:r>
+              <a:rPr lang="en-US" sz="1400" spc="-68">
+                <a:solidFill>
+                  <a:srgbClr val="000000"/>
+                </a:solidFill>
+                <a:latin typeface="Arial"/>
+                <a:ea typeface="Arial"/>
+                <a:cs typeface="Arial"/>
+                <a:sym typeface="Arial"/>
+              </a:rPr>
+              <a:t>Anticiper les stocks sur les périodes à forte demande, notamment au Trimestre 4</a:t>
+            </a:r>
+          </a:p>
+          <a:p>
+            <a:pPr algn="l" marL="302261" indent="-151130" lvl="1">
+              <a:lnSpc>
+                <a:spcPts val="1960"/>
+              </a:lnSpc>
+              <a:buFont typeface="Arial"/>
+              <a:buChar char="•"/>
+            </a:pPr>
+            <a:r>
+              <a:rPr lang="en-US" sz="1400" spc="-68">
+                <a:solidFill>
+                  <a:srgbClr val="000000"/>
+                </a:solidFill>
+                <a:latin typeface="Arial"/>
+                <a:ea typeface="Arial"/>
+                <a:cs typeface="Arial"/>
+                <a:sym typeface="Arial"/>
+              </a:rPr>
+              <a:t>Analyser les leviers ayant contribué à la performance d'octobre 2024 (produits, promotions, catégories, marques) afin de les reproduire sur d'autres périodes.</a:t>
             </a:r>
           </a:p>
         </p:txBody>
       </p:sp>
       <p:sp>
         <p:nvSpPr>
-          <p:cNvPr name="Freeform 12" id="12"/>
+          <p:cNvPr name="Freeform 11" id="11"/>
           <p:cNvSpPr/>
           <p:nvPr/>
         </p:nvSpPr>
@@ -4967,7 +4949,7 @@
       </p:sp>
       <p:sp>
         <p:nvSpPr>
-          <p:cNvPr name="Freeform 13" id="13"/>
+          <p:cNvPr name="Freeform 12" id="12"/>
           <p:cNvSpPr/>
           <p:nvPr/>
         </p:nvSpPr>
@@ -7620,101 +7602,9 @@
           <a:chExt cx="0" cy="0"/>
         </a:xfrm>
       </p:grpSpPr>
-      <p:sp>
-        <p:nvSpPr>
-          <p:cNvPr name="Freeform 2" id="2"/>
-          <p:cNvSpPr/>
-          <p:nvPr/>
-        </p:nvSpPr>
-        <p:spPr>
-          <a:xfrm flipH="false" flipV="false" rot="0">
-            <a:off x="5938653" y="3125361"/>
-            <a:ext cx="5009460" cy="5123729"/>
-          </a:xfrm>
-          <a:custGeom>
-            <a:avLst/>
-            <a:gdLst/>
-            <a:ahLst/>
-            <a:cxnLst/>
-            <a:rect r="r" b="b" t="t" l="l"/>
-            <a:pathLst>
-              <a:path h="5123729" w="5009460">
-                <a:moveTo>
-                  <a:pt x="0" y="0"/>
-                </a:moveTo>
-                <a:lnTo>
-                  <a:pt x="5009460" y="0"/>
-                </a:lnTo>
-                <a:lnTo>
-                  <a:pt x="5009460" y="5123729"/>
-                </a:lnTo>
-                <a:lnTo>
-                  <a:pt x="0" y="5123729"/>
-                </a:lnTo>
-                <a:lnTo>
-                  <a:pt x="0" y="0"/>
-                </a:lnTo>
-                <a:close/>
-              </a:path>
-            </a:pathLst>
-          </a:custGeom>
-          <a:blipFill>
-            <a:blip r:embed="rId2"/>
-            <a:stretch>
-              <a:fillRect l="-61980" t="-7325" r="-55958" b="-11986"/>
-            </a:stretch>
-          </a:blipFill>
-        </p:spPr>
-      </p:sp>
-      <p:sp>
-        <p:nvSpPr>
-          <p:cNvPr name="Freeform 3" id="3"/>
-          <p:cNvSpPr/>
-          <p:nvPr/>
-        </p:nvSpPr>
-        <p:spPr>
-          <a:xfrm flipH="false" flipV="false" rot="0">
-            <a:off x="5938653" y="2701408"/>
-            <a:ext cx="3580393" cy="324000"/>
-          </a:xfrm>
-          <a:custGeom>
-            <a:avLst/>
-            <a:gdLst/>
-            <a:ahLst/>
-            <a:cxnLst/>
-            <a:rect r="r" b="b" t="t" l="l"/>
-            <a:pathLst>
-              <a:path h="324000" w="3580393">
-                <a:moveTo>
-                  <a:pt x="0" y="0"/>
-                </a:moveTo>
-                <a:lnTo>
-                  <a:pt x="3580393" y="0"/>
-                </a:lnTo>
-                <a:lnTo>
-                  <a:pt x="3580393" y="324000"/>
-                </a:lnTo>
-                <a:lnTo>
-                  <a:pt x="0" y="324000"/>
-                </a:lnTo>
-                <a:lnTo>
-                  <a:pt x="0" y="0"/>
-                </a:lnTo>
-                <a:close/>
-              </a:path>
-            </a:pathLst>
-          </a:custGeom>
-          <a:blipFill>
-            <a:blip r:embed="rId3"/>
-            <a:stretch>
-              <a:fillRect l="-1470" t="0" r="-5216" b="-6404"/>
-            </a:stretch>
-          </a:blipFill>
-        </p:spPr>
-      </p:sp>
       <p:grpSp>
         <p:nvGrpSpPr>
-          <p:cNvPr name="Group 4" id="4"/>
+          <p:cNvPr name="Group 2" id="2"/>
           <p:cNvGrpSpPr/>
           <p:nvPr/>
         </p:nvGrpSpPr>
@@ -7728,7 +7618,7 @@
         </p:grpSpPr>
         <p:sp>
           <p:nvSpPr>
-            <p:cNvPr name="Freeform 5" id="5"/>
+            <p:cNvPr name="Freeform 3" id="3"/>
             <p:cNvSpPr/>
             <p:nvPr/>
           </p:nvSpPr>
@@ -7765,10 +7655,10 @@
               </a:pathLst>
             </a:custGeom>
             <a:blipFill>
-              <a:blip r:embed="rId4">
+              <a:blip r:embed="rId2">
                 <a:extLst>
                   <a:ext uri="{96DAC541-7B7A-43D3-8B79-37D633B846F1}">
-                    <asvg:svgBlip xmlns:asvg="http://schemas.microsoft.com/office/drawing/2016/SVG/main" r:embed="rId5"/>
+                    <asvg:svgBlip xmlns:asvg="http://schemas.microsoft.com/office/drawing/2016/SVG/main" r:embed="rId3"/>
                   </a:ext>
                 </a:extLst>
               </a:blip>
@@ -7780,7 +7670,7 @@
         </p:sp>
         <p:sp>
           <p:nvSpPr>
-            <p:cNvPr name="TextBox 6" id="6"/>
+            <p:cNvPr name="TextBox 4" id="4"/>
             <p:cNvSpPr txBox="true"/>
             <p:nvPr/>
           </p:nvSpPr>
@@ -7822,7 +7712,7 @@
       </p:grpSp>
       <p:grpSp>
         <p:nvGrpSpPr>
-          <p:cNvPr name="Group 7" id="7"/>
+          <p:cNvPr name="Group 5" id="5"/>
           <p:cNvGrpSpPr/>
           <p:nvPr/>
         </p:nvGrpSpPr>
@@ -7836,7 +7726,7 @@
         </p:grpSpPr>
         <p:sp>
           <p:nvSpPr>
-            <p:cNvPr name="Freeform 8" id="8"/>
+            <p:cNvPr name="Freeform 6" id="6"/>
             <p:cNvSpPr/>
             <p:nvPr/>
           </p:nvSpPr>
@@ -7873,10 +7763,10 @@
               </a:pathLst>
             </a:custGeom>
             <a:blipFill>
-              <a:blip r:embed="rId4">
+              <a:blip r:embed="rId2">
                 <a:extLst>
                   <a:ext uri="{96DAC541-7B7A-43D3-8B79-37D633B846F1}">
-                    <asvg:svgBlip xmlns:asvg="http://schemas.microsoft.com/office/drawing/2016/SVG/main" r:embed="rId5"/>
+                    <asvg:svgBlip xmlns:asvg="http://schemas.microsoft.com/office/drawing/2016/SVG/main" r:embed="rId3"/>
                   </a:ext>
                 </a:extLst>
               </a:blip>
@@ -7888,7 +7778,7 @@
         </p:sp>
         <p:sp>
           <p:nvSpPr>
-            <p:cNvPr name="TextBox 9" id="9"/>
+            <p:cNvPr name="TextBox 7" id="7"/>
             <p:cNvSpPr txBox="true"/>
             <p:nvPr/>
           </p:nvSpPr>
@@ -7933,7 +7823,7 @@
       </p:grpSp>
       <p:sp>
         <p:nvSpPr>
-          <p:cNvPr name="Freeform 10" id="10"/>
+          <p:cNvPr name="Freeform 8" id="8"/>
           <p:cNvSpPr/>
           <p:nvPr/>
         </p:nvSpPr>
@@ -7970,10 +7860,10 @@
             </a:pathLst>
           </a:custGeom>
           <a:blipFill>
-            <a:blip r:embed="rId6">
+            <a:blip r:embed="rId4">
               <a:extLst>
                 <a:ext uri="{96DAC541-7B7A-43D3-8B79-37D633B846F1}">
-                  <asvg:svgBlip xmlns:asvg="http://schemas.microsoft.com/office/drawing/2016/SVG/main" r:embed="rId7"/>
+                  <asvg:svgBlip xmlns:asvg="http://schemas.microsoft.com/office/drawing/2016/SVG/main" r:embed="rId5"/>
                 </a:ext>
               </a:extLst>
             </a:blip>
@@ -7985,7 +7875,7 @@
       </p:sp>
       <p:sp>
         <p:nvSpPr>
-          <p:cNvPr name="Freeform 11" id="11"/>
+          <p:cNvPr name="Freeform 9" id="9"/>
           <p:cNvSpPr/>
           <p:nvPr/>
         </p:nvSpPr>
@@ -8022,10 +7912,10 @@
             </a:pathLst>
           </a:custGeom>
           <a:blipFill>
-            <a:blip r:embed="rId6">
+            <a:blip r:embed="rId4">
               <a:extLst>
                 <a:ext uri="{96DAC541-7B7A-43D3-8B79-37D633B846F1}">
-                  <asvg:svgBlip xmlns:asvg="http://schemas.microsoft.com/office/drawing/2016/SVG/main" r:embed="rId7"/>
+                  <asvg:svgBlip xmlns:asvg="http://schemas.microsoft.com/office/drawing/2016/SVG/main" r:embed="rId5"/>
                 </a:ext>
               </a:extLst>
             </a:blip>
@@ -8037,7 +7927,7 @@
       </p:sp>
       <p:sp>
         <p:nvSpPr>
-          <p:cNvPr name="Freeform 12" id="12"/>
+          <p:cNvPr name="Freeform 10" id="10"/>
           <p:cNvSpPr/>
           <p:nvPr/>
         </p:nvSpPr>
@@ -8074,7 +7964,7 @@
             </a:pathLst>
           </a:custGeom>
           <a:blipFill>
-            <a:blip r:embed="rId8"/>
+            <a:blip r:embed="rId6"/>
             <a:stretch>
               <a:fillRect l="0" t="0" r="-22948" b="0"/>
             </a:stretch>
@@ -8083,7 +7973,53 @@
       </p:sp>
       <p:sp>
         <p:nvSpPr>
-          <p:cNvPr name="TextBox 13" id="13"/>
+          <p:cNvPr name="Freeform 11" id="11"/>
+          <p:cNvSpPr/>
+          <p:nvPr/>
+        </p:nvSpPr>
+        <p:spPr>
+          <a:xfrm flipH="false" flipV="false" rot="0">
+            <a:off x="5513485" y="3545284"/>
+            <a:ext cx="5806714" cy="4283884"/>
+          </a:xfrm>
+          <a:custGeom>
+            <a:avLst/>
+            <a:gdLst/>
+            <a:ahLst/>
+            <a:cxnLst/>
+            <a:rect r="r" b="b" t="t" l="l"/>
+            <a:pathLst>
+              <a:path h="4283884" w="5806714">
+                <a:moveTo>
+                  <a:pt x="0" y="0"/>
+                </a:moveTo>
+                <a:lnTo>
+                  <a:pt x="5806714" y="0"/>
+                </a:lnTo>
+                <a:lnTo>
+                  <a:pt x="5806714" y="4283884"/>
+                </a:lnTo>
+                <a:lnTo>
+                  <a:pt x="0" y="4283884"/>
+                </a:lnTo>
+                <a:lnTo>
+                  <a:pt x="0" y="0"/>
+                </a:lnTo>
+                <a:close/>
+              </a:path>
+            </a:pathLst>
+          </a:custGeom>
+          <a:blipFill>
+            <a:blip r:embed="rId7"/>
+            <a:stretch>
+              <a:fillRect l="0" t="0" r="-31754" b="0"/>
+            </a:stretch>
+          </a:blipFill>
+        </p:spPr>
+      </p:sp>
+      <p:sp>
+        <p:nvSpPr>
+          <p:cNvPr name="TextBox 12" id="12"/>
           <p:cNvSpPr txBox="true"/>
           <p:nvPr/>
         </p:nvSpPr>
@@ -8124,14 +8060,14 @@
       </p:sp>
       <p:sp>
         <p:nvSpPr>
-          <p:cNvPr name="TextBox 14" id="14"/>
+          <p:cNvPr name="TextBox 13" id="13"/>
           <p:cNvSpPr txBox="true"/>
           <p:nvPr/>
         </p:nvSpPr>
         <p:spPr>
           <a:xfrm rot="0">
-            <a:off x="11479385" y="3396886"/>
-            <a:ext cx="5910830" cy="2047875"/>
+            <a:off x="11438774" y="2373304"/>
+            <a:ext cx="5910830" cy="6010275"/>
           </a:xfrm>
           <a:prstGeom prst="rect">
             <a:avLst/>
@@ -8284,9 +8220,6 @@
               <a:lnSpc>
                 <a:spcPts val="1960"/>
               </a:lnSpc>
-              <a:spcBef>
-                <a:spcPct val="0"/>
-              </a:spcBef>
               <a:buFont typeface="Arial"/>
               <a:buChar char="•"/>
             </a:pPr>
@@ -8303,39 +8236,21 @@
               <a:t>Potentiel identifié dans les villes entre 500 € et 900 € de CA</a:t>
             </a:r>
           </a:p>
-        </p:txBody>
-      </p:sp>
-      <p:sp>
-        <p:nvSpPr>
-          <p:cNvPr name="TextBox 15" id="15"/>
-          <p:cNvSpPr txBox="true"/>
-          <p:nvPr/>
-        </p:nvSpPr>
-        <p:spPr>
-          <a:xfrm rot="0">
-            <a:off x="11479385" y="5639601"/>
-            <a:ext cx="5628663" cy="2352675"/>
-          </a:xfrm>
-          <a:prstGeom prst="rect">
-            <a:avLst/>
-          </a:prstGeom>
-        </p:spPr>
-        <p:txBody>
-          <a:bodyPr anchor="t" rtlCol="false" tIns="0" lIns="0" bIns="0" rIns="0">
-            <a:spAutoFit/>
-          </a:bodyPr>
-          <a:lstStyle/>
-          <a:p>
-            <a:pPr algn="just">
+          <a:p>
+            <a:pPr algn="l">
               <a:lnSpc>
-                <a:spcPts val="2239"/>
+                <a:spcPts val="1960"/>
               </a:lnSpc>
-              <a:spcBef>
-                <a:spcPct val="0"/>
-              </a:spcBef>
+            </a:pPr>
+          </a:p>
+          <a:p>
+            <a:pPr algn="l">
+              <a:lnSpc>
+                <a:spcPts val="1960"/>
+              </a:lnSpc>
             </a:pPr>
             <a:r>
-              <a:rPr lang="en-US" b="true" sz="1599" spc="-78" u="sng">
+              <a:rPr lang="en-US" b="true" sz="1400" spc="-68" u="sng">
                 <a:solidFill>
                   <a:srgbClr val="000000"/>
                 </a:solidFill>
@@ -8344,29 +8259,14 @@
                 <a:cs typeface="Arial Bold"/>
                 <a:sym typeface="Arial Bold"/>
               </a:rPr>
-              <a:t>Insigh</a:t>
+              <a:t>Insights clés :</a:t>
             </a:r>
-            <a:r>
-              <a:rPr lang="en-US" b="true" sz="1599" spc="-78" u="sng">
-                <a:solidFill>
-                  <a:srgbClr val="000000"/>
-                </a:solidFill>
-                <a:latin typeface="Arial Bold"/>
-                <a:ea typeface="Arial Bold"/>
-                <a:cs typeface="Arial Bold"/>
-                <a:sym typeface="Arial Bold"/>
-              </a:rPr>
-              <a:t>t clé :</a:t>
-            </a:r>
-          </a:p>
-          <a:p>
-            <a:pPr algn="just">
+          </a:p>
+          <a:p>
+            <a:pPr algn="l">
               <a:lnSpc>
-                <a:spcPts val="2239"/>
+                <a:spcPts val="1960"/>
               </a:lnSpc>
-              <a:spcBef>
-                <a:spcPct val="0"/>
-              </a:spcBef>
             </a:pPr>
           </a:p>
           <a:p>
@@ -8387,68 +8287,14 @@
                 <a:cs typeface="Arial"/>
                 <a:sym typeface="Arial"/>
               </a:rPr>
-              <a:t>Cont</a:t>
+              <a:t>Le second semestre 2024 est le principal moteur de croissance, avec un pic de ventes en octobre (+87 % vs octobre 2023).</a:t>
             </a:r>
-            <a:r>
-              <a:rPr lang="en-US" sz="1400" spc="-68">
-                <a:solidFill>
-                  <a:srgbClr val="000000"/>
-                </a:solidFill>
-                <a:latin typeface="Arial"/>
-                <a:ea typeface="Arial"/>
-                <a:cs typeface="Arial"/>
-                <a:sym typeface="Arial"/>
-              </a:rPr>
-              <a:t>ra-intuitif : Paris n'est pas dominante. Les villes moyennes représentent un fort potentiel non capturé.</a:t>
-            </a:r>
-          </a:p>
-          <a:p>
-            <a:pPr algn="l">
-              <a:lnSpc>
-                <a:spcPts val="1960"/>
-              </a:lnSpc>
-            </a:pPr>
-          </a:p>
-          <a:p>
-            <a:pPr algn="just">
-              <a:lnSpc>
-                <a:spcPts val="2239"/>
-              </a:lnSpc>
-              <a:spcBef>
-                <a:spcPct val="0"/>
-              </a:spcBef>
-            </a:pPr>
-            <a:r>
-              <a:rPr lang="en-US" b="true" sz="1599" spc="-78" u="sng">
-                <a:solidFill>
-                  <a:srgbClr val="000000"/>
-                </a:solidFill>
-                <a:latin typeface="Arial Bold"/>
-                <a:ea typeface="Arial Bold"/>
-                <a:cs typeface="Arial Bold"/>
-                <a:sym typeface="Arial Bold"/>
-              </a:rPr>
-              <a:t>Recommandation :</a:t>
-            </a:r>
-          </a:p>
-          <a:p>
-            <a:pPr algn="just">
-              <a:lnSpc>
-                <a:spcPts val="2239"/>
-              </a:lnSpc>
-              <a:spcBef>
-                <a:spcPct val="0"/>
-              </a:spcBef>
-            </a:pPr>
           </a:p>
           <a:p>
             <a:pPr algn="l" marL="302261" indent="-151130" lvl="1">
               <a:lnSpc>
                 <a:spcPts val="1960"/>
               </a:lnSpc>
-              <a:spcBef>
-                <a:spcPct val="0"/>
-              </a:spcBef>
               <a:buFont typeface="Arial"/>
               <a:buChar char="•"/>
             </a:pPr>
@@ -8462,8 +8308,50 @@
                 <a:cs typeface="Arial"/>
                 <a:sym typeface="Arial"/>
               </a:rPr>
-              <a:t>Lanc</a:t>
+              <a:t> Malgré quelques ralentissements en février et juillet, le niveau d'activité 2024 reste supérieur à celui de 2023.</a:t>
             </a:r>
+          </a:p>
+          <a:p>
+            <a:pPr algn="l">
+              <a:lnSpc>
+                <a:spcPts val="1960"/>
+              </a:lnSpc>
+            </a:pPr>
+          </a:p>
+          <a:p>
+            <a:pPr algn="l">
+              <a:lnSpc>
+                <a:spcPts val="1960"/>
+              </a:lnSpc>
+            </a:pPr>
+            <a:r>
+              <a:rPr lang="en-US" b="true" sz="1400" spc="-68" u="sng">
+                <a:solidFill>
+                  <a:srgbClr val="000000"/>
+                </a:solidFill>
+                <a:latin typeface="Arial Bold"/>
+                <a:ea typeface="Arial Bold"/>
+                <a:cs typeface="Arial Bold"/>
+                <a:sym typeface="Arial Bold"/>
+              </a:rPr>
+              <a:t>Recommandations :</a:t>
+            </a:r>
+          </a:p>
+          <a:p>
+            <a:pPr algn="l">
+              <a:lnSpc>
+                <a:spcPts val="1960"/>
+              </a:lnSpc>
+            </a:pPr>
+          </a:p>
+          <a:p>
+            <a:pPr algn="l" marL="302261" indent="-151130" lvl="1">
+              <a:lnSpc>
+                <a:spcPts val="1960"/>
+              </a:lnSpc>
+              <a:buFont typeface="Arial"/>
+              <a:buChar char="•"/>
+            </a:pPr>
             <a:r>
               <a:rPr lang="en-US" sz="1400" spc="-68">
                 <a:solidFill>
@@ -8474,8 +8362,60 @@
                 <a:cs typeface="Arial"/>
                 <a:sym typeface="Arial"/>
               </a:rPr>
-              <a:t>er des campagnes géo-ciblées sur les villes à fort potentiel (500-900€ CA). Objectif : activer 10 nouvelles villes en 2025 pour +15% CA.</a:t>
+              <a:t>Renforcer les campagnes marketing dès T3</a:t>
             </a:r>
+          </a:p>
+          <a:p>
+            <a:pPr algn="l" marL="302261" indent="-151130" lvl="1">
+              <a:lnSpc>
+                <a:spcPts val="1960"/>
+              </a:lnSpc>
+              <a:buFont typeface="Arial"/>
+              <a:buChar char="•"/>
+            </a:pPr>
+            <a:r>
+              <a:rPr lang="en-US" sz="1400" spc="-68">
+                <a:solidFill>
+                  <a:srgbClr val="000000"/>
+                </a:solidFill>
+                <a:latin typeface="Arial"/>
+                <a:ea typeface="Arial"/>
+                <a:cs typeface="Arial"/>
+                <a:sym typeface="Arial"/>
+              </a:rPr>
+              <a:t>Anticiper les stocks sur les périodes à forte demande, notamment au Trimestre 4</a:t>
+            </a:r>
+          </a:p>
+          <a:p>
+            <a:pPr algn="l" marL="302261" indent="-151130" lvl="1">
+              <a:lnSpc>
+                <a:spcPts val="1960"/>
+              </a:lnSpc>
+              <a:buFont typeface="Arial"/>
+              <a:buChar char="•"/>
+            </a:pPr>
+            <a:r>
+              <a:rPr lang="en-US" sz="1400" spc="-68">
+                <a:solidFill>
+                  <a:srgbClr val="000000"/>
+                </a:solidFill>
+                <a:latin typeface="Arial"/>
+                <a:ea typeface="Arial"/>
+                <a:cs typeface="Arial"/>
+                <a:sym typeface="Arial"/>
+              </a:rPr>
+              <a:t>Analyser les leviers ayant contribué à la performance d'octobre 2024 (produits, promotions, catégories, marques) afin de les reproduire sur d'autres périodes.</a:t>
+            </a:r>
+          </a:p>
+          <a:p>
+            <a:pPr algn="l">
+              <a:lnSpc>
+                <a:spcPts val="1960"/>
+              </a:lnSpc>
+              <a:spcBef>
+                <a:spcPct val="0"/>
+              </a:spcBef>
+            </a:pPr>
           </a:p>
         </p:txBody>
       </p:sp>

--- a/slides/soutenance_20min.pptx
+++ b/slides/soutenance_20min.pptx
@@ -6565,94 +6565,6 @@
             </a:stretch>
           </a:blipFill>
         </p:spPr>
-      </p:sp>
-      <p:sp>
-        <p:nvSpPr>
-          <p:cNvPr name="TextBox 13" id="13"/>
-          <p:cNvSpPr txBox="true"/>
-          <p:nvPr/>
-        </p:nvSpPr>
-        <p:spPr>
-          <a:xfrm rot="0">
-            <a:off x="3078876" y="2636612"/>
-            <a:ext cx="386507" cy="276225"/>
-          </a:xfrm>
-          <a:prstGeom prst="rect">
-            <a:avLst/>
-          </a:prstGeom>
-        </p:spPr>
-        <p:txBody>
-          <a:bodyPr anchor="t" rtlCol="false" tIns="0" lIns="0" bIns="0" rIns="0">
-            <a:spAutoFit/>
-          </a:bodyPr>
-          <a:lstStyle/>
-          <a:p>
-            <a:pPr algn="ctr">
-              <a:lnSpc>
-                <a:spcPts val="2100"/>
-              </a:lnSpc>
-              <a:spcBef>
-                <a:spcPct val="0"/>
-              </a:spcBef>
-            </a:pPr>
-            <a:r>
-              <a:rPr lang="en-US" sz="1500" spc="-73">
-                <a:solidFill>
-                  <a:srgbClr val="000000"/>
-                </a:solidFill>
-                <a:latin typeface="Arial"/>
-                <a:ea typeface="Arial"/>
-                <a:cs typeface="Arial"/>
-                <a:sym typeface="Arial"/>
-              </a:rPr>
-              <a:t>2023</a:t>
-            </a:r>
-          </a:p>
-        </p:txBody>
-      </p:sp>
-      <p:sp>
-        <p:nvSpPr>
-          <p:cNvPr name="TextBox 14" id="14"/>
-          <p:cNvSpPr txBox="true"/>
-          <p:nvPr/>
-        </p:nvSpPr>
-        <p:spPr>
-          <a:xfrm rot="0">
-            <a:off x="5014881" y="2636612"/>
-            <a:ext cx="386507" cy="276225"/>
-          </a:xfrm>
-          <a:prstGeom prst="rect">
-            <a:avLst/>
-          </a:prstGeom>
-        </p:spPr>
-        <p:txBody>
-          <a:bodyPr anchor="t" rtlCol="false" tIns="0" lIns="0" bIns="0" rIns="0">
-            <a:spAutoFit/>
-          </a:bodyPr>
-          <a:lstStyle/>
-          <a:p>
-            <a:pPr algn="ctr">
-              <a:lnSpc>
-                <a:spcPts val="2100"/>
-              </a:lnSpc>
-              <a:spcBef>
-                <a:spcPct val="0"/>
-              </a:spcBef>
-            </a:pPr>
-            <a:r>
-              <a:rPr lang="en-US" sz="1500" spc="-73">
-                <a:solidFill>
-                  <a:srgbClr val="000000"/>
-                </a:solidFill>
-                <a:latin typeface="Arial"/>
-                <a:ea typeface="Arial"/>
-                <a:cs typeface="Arial"/>
-                <a:sym typeface="Arial"/>
-              </a:rPr>
-              <a:t>2024</a:t>
-            </a:r>
-          </a:p>
-        </p:txBody>
       </p:sp>
     </p:spTree>
   </p:cSld>

--- a/slides/soutenance_20min.pptx
+++ b/slides/soutenance_20min.pptx
@@ -3747,7 +3747,7 @@
         </p:nvSpPr>
         <p:spPr>
           <a:xfrm rot="0">
-            <a:off x="1028700" y="1854081"/>
+            <a:off x="1209418" y="1855470"/>
             <a:ext cx="6942578" cy="355473"/>
           </a:xfrm>
           <a:prstGeom prst="rect">
@@ -4526,7 +4526,7 @@
         </p:nvSpPr>
         <p:spPr>
           <a:xfrm rot="0">
-            <a:off x="7581043" y="1506795"/>
+            <a:off x="1146524" y="1756135"/>
             <a:ext cx="3125914" cy="355473"/>
           </a:xfrm>
           <a:prstGeom prst="rect">
@@ -5032,8 +5032,8 @@
         </p:nvSpPr>
         <p:spPr>
           <a:xfrm flipH="false" flipV="false" rot="0">
-            <a:off x="1158073" y="2780700"/>
-            <a:ext cx="8265372" cy="5047506"/>
+            <a:off x="8979640" y="1732524"/>
+            <a:ext cx="5941264" cy="3628217"/>
           </a:xfrm>
           <a:custGeom>
             <a:avLst/>
@@ -5042,18 +5042,18 @@
             <a:cxnLst/>
             <a:rect r="r" b="b" t="t" l="l"/>
             <a:pathLst>
-              <a:path h="5047506" w="8265372">
+              <a:path h="3628217" w="5941264">
                 <a:moveTo>
                   <a:pt x="0" y="0"/>
                 </a:moveTo>
                 <a:lnTo>
-                  <a:pt x="8265373" y="0"/>
+                  <a:pt x="5941263" y="0"/>
                 </a:lnTo>
                 <a:lnTo>
-                  <a:pt x="8265373" y="5047507"/>
+                  <a:pt x="5941263" y="3628217"/>
                 </a:lnTo>
                 <a:lnTo>
-                  <a:pt x="0" y="5047507"/>
+                  <a:pt x="0" y="3628217"/>
                 </a:lnTo>
                 <a:lnTo>
                   <a:pt x="0" y="0"/>
@@ -5341,88 +5341,144 @@
           </a:blipFill>
         </p:spPr>
       </p:sp>
-      <p:grpSp>
-        <p:nvGrpSpPr>
-          <p:cNvPr name="Group 10" id="10"/>
-          <p:cNvGrpSpPr/>
+      <p:sp>
+        <p:nvSpPr>
+          <p:cNvPr name="Freeform 10" id="10"/>
+          <p:cNvSpPr/>
           <p:nvPr/>
-        </p:nvGrpSpPr>
-        <p:grpSpPr>
-          <a:xfrm rot="0">
-            <a:off x="7841310" y="2555641"/>
-            <a:ext cx="1582136" cy="450119"/>
-            <a:chOff x="0" y="0"/>
-            <a:chExt cx="416694" cy="118550"/>
+        </p:nvSpPr>
+        <p:spPr>
+          <a:xfrm flipH="false" flipV="false" rot="0">
+            <a:off x="1028700" y="4274813"/>
+            <a:ext cx="7293078" cy="4339381"/>
           </a:xfrm>
-        </p:grpSpPr>
-        <p:sp>
-          <p:nvSpPr>
-            <p:cNvPr name="Freeform 11" id="11"/>
-            <p:cNvSpPr/>
-            <p:nvPr/>
-          </p:nvSpPr>
-          <p:spPr>
-            <a:xfrm flipH="false" flipV="false" rot="0">
-              <a:off x="0" y="0"/>
-              <a:ext cx="416694" cy="118550"/>
-            </a:xfrm>
-            <a:custGeom>
-              <a:avLst/>
-              <a:gdLst/>
-              <a:ahLst/>
-              <a:cxnLst/>
-              <a:rect r="r" b="b" t="t" l="l"/>
-              <a:pathLst>
-                <a:path h="118550" w="416694">
-                  <a:moveTo>
-                    <a:pt x="0" y="0"/>
-                  </a:moveTo>
-                  <a:lnTo>
-                    <a:pt x="416694" y="0"/>
-                  </a:lnTo>
-                  <a:lnTo>
-                    <a:pt x="416694" y="118550"/>
-                  </a:lnTo>
-                  <a:lnTo>
-                    <a:pt x="0" y="118550"/>
-                  </a:lnTo>
-                  <a:close/>
-                </a:path>
-              </a:pathLst>
-            </a:custGeom>
-            <a:solidFill>
-              <a:srgbClr val="FFFFFF"/>
-            </a:solidFill>
-          </p:spPr>
-        </p:sp>
-        <p:sp>
-          <p:nvSpPr>
-            <p:cNvPr name="TextBox 12" id="12"/>
-            <p:cNvSpPr txBox="true"/>
-            <p:nvPr/>
-          </p:nvSpPr>
-          <p:spPr>
-            <a:xfrm>
-              <a:off x="0" y="28575"/>
-              <a:ext cx="416694" cy="89975"/>
-            </a:xfrm>
-            <a:prstGeom prst="rect">
-              <a:avLst/>
-            </a:prstGeom>
-          </p:spPr>
-          <p:txBody>
-            <a:bodyPr anchor="ctr" rtlCol="false" tIns="50800" lIns="50800" bIns="50800" rIns="50800"/>
-            <a:lstStyle/>
-            <a:p>
-              <a:pPr algn="ctr">
-                <a:lnSpc>
-                  <a:spcPts val="1305"/>
-                </a:lnSpc>
-              </a:pPr>
-            </a:p>
-          </p:txBody>
-        </p:sp>
-      </p:grpSp>
+          <a:custGeom>
+            <a:avLst/>
+            <a:gdLst/>
+            <a:ahLst/>
+            <a:cxnLst/>
+            <a:rect r="r" b="b" t="t" l="l"/>
+            <a:pathLst>
+              <a:path h="4339381" w="7293078">
+                <a:moveTo>
+                  <a:pt x="0" y="0"/>
+                </a:moveTo>
+                <a:lnTo>
+                  <a:pt x="7293078" y="0"/>
+                </a:lnTo>
+                <a:lnTo>
+                  <a:pt x="7293078" y="4339382"/>
+                </a:lnTo>
+                <a:lnTo>
+                  <a:pt x="0" y="4339382"/>
+                </a:lnTo>
+                <a:lnTo>
+                  <a:pt x="0" y="0"/>
+                </a:lnTo>
+                <a:close/>
+              </a:path>
+            </a:pathLst>
+          </a:custGeom>
+          <a:blipFill>
+            <a:blip r:embed="rId7"/>
+            <a:stretch>
+              <a:fillRect l="0" t="0" r="0" b="0"/>
+            </a:stretch>
+          </a:blipFill>
+        </p:spPr>
+      </p:sp>
+      <p:sp>
+        <p:nvSpPr>
+          <p:cNvPr name="Freeform 11" id="11"/>
+          <p:cNvSpPr/>
+          <p:nvPr/>
+        </p:nvSpPr>
+        <p:spPr>
+          <a:xfrm flipH="false" flipV="false" rot="0">
+            <a:off x="2330541" y="2497572"/>
+            <a:ext cx="1881104" cy="1256999"/>
+          </a:xfrm>
+          <a:custGeom>
+            <a:avLst/>
+            <a:gdLst/>
+            <a:ahLst/>
+            <a:cxnLst/>
+            <a:rect r="r" b="b" t="t" l="l"/>
+            <a:pathLst>
+              <a:path h="1256999" w="1881104">
+                <a:moveTo>
+                  <a:pt x="0" y="0"/>
+                </a:moveTo>
+                <a:lnTo>
+                  <a:pt x="1881103" y="0"/>
+                </a:lnTo>
+                <a:lnTo>
+                  <a:pt x="1881103" y="1256999"/>
+                </a:lnTo>
+                <a:lnTo>
+                  <a:pt x="0" y="1256999"/>
+                </a:lnTo>
+                <a:lnTo>
+                  <a:pt x="0" y="0"/>
+                </a:lnTo>
+                <a:close/>
+              </a:path>
+            </a:pathLst>
+          </a:custGeom>
+          <a:blipFill>
+            <a:blip r:embed="rId8"/>
+            <a:stretch>
+              <a:fillRect l="0" t="0" r="0" b="0"/>
+            </a:stretch>
+          </a:blipFill>
+        </p:spPr>
+      </p:sp>
+      <p:sp>
+        <p:nvSpPr>
+          <p:cNvPr name="Freeform 12" id="12"/>
+          <p:cNvSpPr/>
+          <p:nvPr/>
+        </p:nvSpPr>
+        <p:spPr>
+          <a:xfrm flipH="false" flipV="false" rot="0">
+            <a:off x="5267421" y="2618991"/>
+            <a:ext cx="1904598" cy="1191502"/>
+          </a:xfrm>
+          <a:custGeom>
+            <a:avLst/>
+            <a:gdLst/>
+            <a:ahLst/>
+            <a:cxnLst/>
+            <a:rect r="r" b="b" t="t" l="l"/>
+            <a:pathLst>
+              <a:path h="1191502" w="1904598">
+                <a:moveTo>
+                  <a:pt x="0" y="0"/>
+                </a:moveTo>
+                <a:lnTo>
+                  <a:pt x="1904598" y="0"/>
+                </a:lnTo>
+                <a:lnTo>
+                  <a:pt x="1904598" y="1191503"/>
+                </a:lnTo>
+                <a:lnTo>
+                  <a:pt x="0" y="1191503"/>
+                </a:lnTo>
+                <a:lnTo>
+                  <a:pt x="0" y="0"/>
+                </a:lnTo>
+                <a:close/>
+              </a:path>
+            </a:pathLst>
+          </a:custGeom>
+          <a:blipFill>
+            <a:blip r:embed="rId9"/>
+            <a:stretch>
+              <a:fillRect l="0" t="0" r="0" b="0"/>
+            </a:stretch>
+          </a:blipFill>
+        </p:spPr>
+      </p:sp>
       <p:sp>
         <p:nvSpPr>
           <p:cNvPr name="TextBox 13" id="13"/>
@@ -5431,7 +5487,7 @@
         </p:nvSpPr>
         <p:spPr>
           <a:xfrm rot="0">
-            <a:off x="1028700" y="1939452"/>
+            <a:off x="1166502" y="1799199"/>
             <a:ext cx="5311098" cy="355473"/>
           </a:xfrm>
           <a:prstGeom prst="rect">
@@ -5472,8 +5528,8 @@
         </p:nvSpPr>
         <p:spPr>
           <a:xfrm rot="0">
-            <a:off x="10092969" y="2508016"/>
-            <a:ext cx="5910830" cy="4857750"/>
+            <a:off x="8979640" y="5533154"/>
+            <a:ext cx="7913048" cy="3410513"/>
           </a:xfrm>
           <a:prstGeom prst="rect">
             <a:avLst/>
@@ -5487,14 +5543,14 @@
           <a:p>
             <a:pPr algn="just">
               <a:lnSpc>
-                <a:spcPts val="2239"/>
+                <a:spcPts val="1683"/>
               </a:lnSpc>
               <a:spcBef>
                 <a:spcPct val="0"/>
               </a:spcBef>
             </a:pPr>
             <a:r>
-              <a:rPr lang="en-US" b="true" sz="1599" spc="-78" u="sng">
+              <a:rPr lang="en-US" b="true" sz="1202" spc="-58" u="sng">
                 <a:solidFill>
                   <a:srgbClr val="000000"/>
                 </a:solidFill>
@@ -5509,7 +5565,7 @@
           <a:p>
             <a:pPr algn="just">
               <a:lnSpc>
-                <a:spcPts val="2239"/>
+                <a:spcPts val="1609"/>
               </a:lnSpc>
               <a:spcBef>
                 <a:spcPct val="0"/>
@@ -5517,15 +5573,15 @@
             </a:pPr>
           </a:p>
           <a:p>
-            <a:pPr algn="l" marL="302261" indent="-151130" lvl="1">
+            <a:pPr algn="l" marL="227215" indent="-113607" lvl="1">
               <a:lnSpc>
-                <a:spcPts val="1960"/>
+                <a:spcPts val="1473"/>
               </a:lnSpc>
               <a:buFont typeface="Arial"/>
               <a:buChar char="•"/>
             </a:pPr>
             <a:r>
-              <a:rPr lang="en-US" sz="1400" spc="-68">
+              <a:rPr lang="en-US" sz="1052" spc="-51">
                 <a:solidFill>
                   <a:srgbClr val="000000"/>
                 </a:solidFill>
@@ -5538,15 +5594,15 @@
             </a:r>
           </a:p>
           <a:p>
-            <a:pPr algn="l" marL="302261" indent="-151130" lvl="1">
+            <a:pPr algn="l" marL="227215" indent="-113607" lvl="1">
               <a:lnSpc>
-                <a:spcPts val="1960"/>
+                <a:spcPts val="1473"/>
               </a:lnSpc>
               <a:buFont typeface="Arial"/>
               <a:buChar char="•"/>
             </a:pPr>
             <a:r>
-              <a:rPr lang="en-US" sz="1400" spc="-68">
+              <a:rPr lang="en-US" sz="1052" spc="-51">
                 <a:solidFill>
                   <a:srgbClr val="000000"/>
                 </a:solidFill>
@@ -5559,15 +5615,15 @@
             </a:r>
           </a:p>
           <a:p>
-            <a:pPr algn="l" marL="302261" indent="-151130" lvl="1">
+            <a:pPr algn="l" marL="227215" indent="-113607" lvl="1">
               <a:lnSpc>
-                <a:spcPts val="1960"/>
+                <a:spcPts val="1473"/>
               </a:lnSpc>
               <a:buFont typeface="Arial"/>
               <a:buChar char="•"/>
             </a:pPr>
             <a:r>
-              <a:rPr lang="en-US" sz="1400" spc="-68">
+              <a:rPr lang="en-US" sz="1052" spc="-51">
                 <a:solidFill>
                   <a:srgbClr val="000000"/>
                 </a:solidFill>
@@ -5580,15 +5636,15 @@
             </a:r>
           </a:p>
           <a:p>
-            <a:pPr algn="l" marL="302261" indent="-151130" lvl="1">
+            <a:pPr algn="l" marL="227215" indent="-113607" lvl="1">
               <a:lnSpc>
-                <a:spcPts val="1960"/>
+                <a:spcPts val="1473"/>
               </a:lnSpc>
               <a:buFont typeface="Arial"/>
               <a:buChar char="•"/>
             </a:pPr>
             <a:r>
-              <a:rPr lang="en-US" sz="1400" spc="-68">
+              <a:rPr lang="en-US" sz="1052" spc="-51">
                 <a:solidFill>
                   <a:srgbClr val="000000"/>
                 </a:solidFill>
@@ -5601,15 +5657,15 @@
             </a:r>
           </a:p>
           <a:p>
-            <a:pPr algn="l" marL="302261" indent="-151130" lvl="1">
+            <a:pPr algn="l" marL="227215" indent="-113607" lvl="1">
               <a:lnSpc>
-                <a:spcPts val="1960"/>
+                <a:spcPts val="1473"/>
               </a:lnSpc>
               <a:buFont typeface="Arial"/>
               <a:buChar char="•"/>
             </a:pPr>
             <a:r>
-              <a:rPr lang="en-US" sz="1400" spc="-68">
+              <a:rPr lang="en-US" sz="1052" spc="-51">
                 <a:solidFill>
                   <a:srgbClr val="000000"/>
                 </a:solidFill>
@@ -5622,15 +5678,15 @@
             </a:r>
           </a:p>
           <a:p>
-            <a:pPr algn="l" marL="302261" indent="-151130" lvl="1">
+            <a:pPr algn="l" marL="227215" indent="-113607" lvl="1">
               <a:lnSpc>
-                <a:spcPts val="1960"/>
+                <a:spcPts val="1473"/>
               </a:lnSpc>
               <a:buFont typeface="Arial"/>
               <a:buChar char="•"/>
             </a:pPr>
             <a:r>
-              <a:rPr lang="en-US" sz="1400" spc="-68">
+              <a:rPr lang="en-US" sz="1052" spc="-51">
                 <a:solidFill>
                   <a:srgbClr val="000000"/>
                 </a:solidFill>
@@ -5645,18 +5701,18 @@
           <a:p>
             <a:pPr algn="l">
               <a:lnSpc>
-                <a:spcPts val="1960"/>
+                <a:spcPts val="1408"/>
               </a:lnSpc>
             </a:pPr>
           </a:p>
           <a:p>
             <a:pPr algn="just">
               <a:lnSpc>
-                <a:spcPts val="2239"/>
+                <a:spcPts val="1683"/>
               </a:lnSpc>
             </a:pPr>
             <a:r>
-              <a:rPr lang="en-US" b="true" sz="1599" spc="-78" u="sng">
+              <a:rPr lang="en-US" b="true" sz="1202" spc="-58" u="sng">
                 <a:solidFill>
                   <a:srgbClr val="000000"/>
                 </a:solidFill>
@@ -5671,20 +5727,20 @@
           <a:p>
             <a:pPr algn="just">
               <a:lnSpc>
-                <a:spcPts val="1960"/>
+                <a:spcPts val="1408"/>
               </a:lnSpc>
             </a:pPr>
           </a:p>
           <a:p>
-            <a:pPr algn="l" marL="302261" indent="-151130" lvl="1">
+            <a:pPr algn="l" marL="227215" indent="-113607" lvl="1">
               <a:lnSpc>
-                <a:spcPts val="1960"/>
+                <a:spcPts val="1473"/>
               </a:lnSpc>
               <a:buFont typeface="Arial"/>
               <a:buChar char="•"/>
             </a:pPr>
             <a:r>
-              <a:rPr lang="en-US" sz="1400" spc="-68">
+              <a:rPr lang="en-US" sz="1052" spc="-51">
                 <a:solidFill>
                   <a:srgbClr val="000000"/>
                 </a:solidFill>
@@ -5697,15 +5753,15 @@
             </a:r>
           </a:p>
           <a:p>
-            <a:pPr algn="l" marL="302261" indent="-151130" lvl="1">
+            <a:pPr algn="l" marL="227215" indent="-113607" lvl="1">
               <a:lnSpc>
-                <a:spcPts val="1960"/>
+                <a:spcPts val="1473"/>
               </a:lnSpc>
               <a:buFont typeface="Arial"/>
               <a:buChar char="•"/>
             </a:pPr>
             <a:r>
-              <a:rPr lang="en-US" sz="1400" spc="-68">
+              <a:rPr lang="en-US" sz="1052" spc="-51">
                 <a:solidFill>
                   <a:srgbClr val="000000"/>
                 </a:solidFill>
@@ -5720,7 +5776,7 @@
           <a:p>
             <a:pPr algn="just">
               <a:lnSpc>
-                <a:spcPts val="1960"/>
+                <a:spcPts val="1408"/>
               </a:lnSpc>
               <a:spcBef>
                 <a:spcPct val="0"/>
@@ -5730,14 +5786,14 @@
           <a:p>
             <a:pPr algn="just">
               <a:lnSpc>
-                <a:spcPts val="2239"/>
+                <a:spcPts val="1683"/>
               </a:lnSpc>
               <a:spcBef>
                 <a:spcPct val="0"/>
               </a:spcBef>
             </a:pPr>
             <a:r>
-              <a:rPr lang="en-US" b="true" sz="1599" spc="-78" u="sng">
+              <a:rPr lang="en-US" b="true" sz="1202" spc="-58" u="sng">
                 <a:solidFill>
                   <a:srgbClr val="000000"/>
                 </a:solidFill>
@@ -5746,25 +5802,13 @@
                 <a:cs typeface="Arial Bold"/>
                 <a:sym typeface="Arial Bold"/>
               </a:rPr>
-              <a:t>Recomma</a:t>
-            </a:r>
-            <a:r>
-              <a:rPr lang="en-US" b="true" sz="1599" spc="-78" u="sng">
-                <a:solidFill>
-                  <a:srgbClr val="000000"/>
-                </a:solidFill>
-                <a:latin typeface="Arial Bold"/>
-                <a:ea typeface="Arial Bold"/>
-                <a:cs typeface="Arial Bold"/>
-                <a:sym typeface="Arial Bold"/>
-              </a:rPr>
-              <a:t>ndation :</a:t>
+              <a:t>Recommandation :</a:t>
             </a:r>
           </a:p>
           <a:p>
             <a:pPr algn="just">
               <a:lnSpc>
-                <a:spcPts val="2239"/>
+                <a:spcPts val="1609"/>
               </a:lnSpc>
               <a:spcBef>
                 <a:spcPct val="0"/>
@@ -5772,15 +5816,15 @@
             </a:pPr>
           </a:p>
           <a:p>
-            <a:pPr algn="l" marL="302261" indent="-151130" lvl="1">
+            <a:pPr algn="l" marL="227215" indent="-113607" lvl="1">
               <a:lnSpc>
-                <a:spcPts val="1960"/>
+                <a:spcPts val="1473"/>
               </a:lnSpc>
               <a:buFont typeface="Arial"/>
               <a:buChar char="•"/>
             </a:pPr>
             <a:r>
-              <a:rPr lang="en-US" sz="1400" spc="-68">
+              <a:rPr lang="en-US" sz="1052" spc="-51">
                 <a:solidFill>
                   <a:srgbClr val="000000"/>
                 </a:solidFill>
@@ -5795,7 +5839,7 @@
           <a:p>
             <a:pPr algn="just">
               <a:lnSpc>
-                <a:spcPts val="1960"/>
+                <a:spcPts val="1473"/>
               </a:lnSpc>
               <a:spcBef>
                 <a:spcPct val="0"/>
@@ -8082,7 +8126,7 @@
                 <a:cs typeface="Arial"/>
                 <a:sym typeface="Arial"/>
               </a:rPr>
-              <a:t>Les villes moyennes montrent un CA per capita supérieur aux grandes villes</a:t>
+              <a:t>Les villes moyennes montrent un CA par personne supérieur aux grandes villes</a:t>
             </a:r>
           </a:p>
           <a:p>
@@ -14840,7 +14884,7 @@
         </p:nvSpPr>
         <p:spPr>
           <a:xfrm rot="0">
-            <a:off x="7520174" y="1391665"/>
+            <a:off x="1177593" y="1500751"/>
             <a:ext cx="3247653" cy="500380"/>
           </a:xfrm>
           <a:prstGeom prst="rect">
@@ -17508,7 +17552,7 @@
         </p:nvSpPr>
         <p:spPr>
           <a:xfrm rot="0">
-            <a:off x="7147704" y="1509800"/>
+            <a:off x="1209418" y="1643479"/>
             <a:ext cx="3992592" cy="355473"/>
           </a:xfrm>
           <a:prstGeom prst="rect">
@@ -18283,7 +18327,7 @@
         </p:nvSpPr>
         <p:spPr>
           <a:xfrm rot="0">
-            <a:off x="7185753" y="1511120"/>
+            <a:off x="1217182" y="1853962"/>
             <a:ext cx="3916495" cy="355473"/>
           </a:xfrm>
           <a:prstGeom prst="rect">
@@ -18748,7 +18792,7 @@
         </p:nvSpPr>
         <p:spPr>
           <a:xfrm rot="0">
-            <a:off x="6773370" y="1276093"/>
+            <a:off x="1300004" y="1588006"/>
             <a:ext cx="4741260" cy="355473"/>
           </a:xfrm>
           <a:prstGeom prst="rect">
